--- a/Trie_Inverted_Index_Search_Engine_DSA.pptx
+++ b/Trie_Inverted_Index_Search_Engine_DSA.pptx
@@ -3346,11 +3346,11 @@
             </a:r>
             <a:br/>
             <a:r>
-              <a:t>Game Systems, AI &amp; XR</a:t>
+              <a:t>Game Developer &amp; Creative Technologist</a:t>
             </a:r>
             <a:br/>
             <a:r>
-              <a:t>Portfolio: arbazarshad.com</a:t>
+              <a:t>Portfolio: arbazarshad.vercel.app</a:t>
             </a:r>
             <a:br/>
             <a:r>
@@ -5551,7 +5551,7 @@
                   <a:srgbClr val="94A3B8"/>
                 </a:solidFill>
               </a:rPr>
-              <a:t>Arbaz Arshad (arbazarshad.com)</a:t>
+              <a:t>Arbaz Arshad (arbazarshad.vercel.app)</a:t>
             </a:r>
           </a:p>
           <a:p>
